--- a/강의자료/Lecture4.pptx
+++ b/강의자료/Lecture4.pptx
@@ -261,7 +261,7 @@
           <a:p>
             <a:fld id="{0AE34835-998C-48F3-922B-834DDD525EE4}" type="datetimeFigureOut">
               <a:rPr lang="ko-KR" altLang="en-US" smtClean="0"/>
-              <a:t>2025-11-12</a:t>
+              <a:t>2025-11-24</a:t>
             </a:fld>
             <a:endParaRPr lang="ko-KR" altLang="en-US"/>
           </a:p>
@@ -661,7 +661,7 @@
           <a:p>
             <a:fld id="{FB30EDBD-1C2D-4C1E-B459-B60219FAB484}" type="datetimeFigureOut">
               <a:rPr lang="ko-KR" altLang="en-US" smtClean="0"/>
-              <a:t>2025-11-12</a:t>
+              <a:t>2025-11-24</a:t>
             </a:fld>
             <a:endParaRPr lang="ko-KR" altLang="en-US"/>
           </a:p>
@@ -948,7 +948,7 @@
           <a:p>
             <a:fld id="{FB30EDBD-1C2D-4C1E-B459-B60219FAB484}" type="datetimeFigureOut">
               <a:rPr lang="ko-KR" altLang="en-US" smtClean="0"/>
-              <a:t>2025-11-12</a:t>
+              <a:t>2025-11-24</a:t>
             </a:fld>
             <a:endParaRPr lang="ko-KR" altLang="en-US"/>
           </a:p>
@@ -1140,7 +1140,7 @@
           <a:p>
             <a:fld id="{FB30EDBD-1C2D-4C1E-B459-B60219FAB484}" type="datetimeFigureOut">
               <a:rPr lang="ko-KR" altLang="en-US" smtClean="0"/>
-              <a:t>2025-11-12</a:t>
+              <a:t>2025-11-24</a:t>
             </a:fld>
             <a:endParaRPr lang="ko-KR" altLang="en-US"/>
           </a:p>
@@ -1401,7 +1401,7 @@
           <a:p>
             <a:fld id="{FB30EDBD-1C2D-4C1E-B459-B60219FAB484}" type="datetimeFigureOut">
               <a:rPr lang="ko-KR" altLang="en-US" smtClean="0"/>
-              <a:t>2025-11-12</a:t>
+              <a:t>2025-11-24</a:t>
             </a:fld>
             <a:endParaRPr lang="ko-KR" altLang="en-US"/>
           </a:p>
@@ -1825,7 +1825,7 @@
           <a:p>
             <a:fld id="{FB30EDBD-1C2D-4C1E-B459-B60219FAB484}" type="datetimeFigureOut">
               <a:rPr lang="ko-KR" altLang="en-US" smtClean="0"/>
-              <a:t>2025-11-12</a:t>
+              <a:t>2025-11-24</a:t>
             </a:fld>
             <a:endParaRPr lang="ko-KR" altLang="en-US"/>
           </a:p>
@@ -2371,7 +2371,7 @@
           <a:p>
             <a:fld id="{FB30EDBD-1C2D-4C1E-B459-B60219FAB484}" type="datetimeFigureOut">
               <a:rPr lang="ko-KR" altLang="en-US" smtClean="0"/>
-              <a:t>2025-11-12</a:t>
+              <a:t>2025-11-24</a:t>
             </a:fld>
             <a:endParaRPr lang="ko-KR" altLang="en-US"/>
           </a:p>
@@ -3211,7 +3211,7 @@
           <a:p>
             <a:fld id="{FB30EDBD-1C2D-4C1E-B459-B60219FAB484}" type="datetimeFigureOut">
               <a:rPr lang="ko-KR" altLang="en-US" smtClean="0"/>
-              <a:t>2025-11-12</a:t>
+              <a:t>2025-11-24</a:t>
             </a:fld>
             <a:endParaRPr lang="ko-KR" altLang="en-US"/>
           </a:p>
@@ -3381,7 +3381,7 @@
           <a:p>
             <a:fld id="{FB30EDBD-1C2D-4C1E-B459-B60219FAB484}" type="datetimeFigureOut">
               <a:rPr lang="ko-KR" altLang="en-US" smtClean="0"/>
-              <a:t>2025-11-12</a:t>
+              <a:t>2025-11-24</a:t>
             </a:fld>
             <a:endParaRPr lang="ko-KR" altLang="en-US"/>
           </a:p>
@@ -3565,7 +3565,7 @@
           <a:p>
             <a:fld id="{FB30EDBD-1C2D-4C1E-B459-B60219FAB484}" type="datetimeFigureOut">
               <a:rPr lang="ko-KR" altLang="en-US" smtClean="0"/>
-              <a:t>2025-11-12</a:t>
+              <a:t>2025-11-24</a:t>
             </a:fld>
             <a:endParaRPr lang="ko-KR" altLang="en-US"/>
           </a:p>
@@ -3735,7 +3735,7 @@
           <a:p>
             <a:fld id="{FB30EDBD-1C2D-4C1E-B459-B60219FAB484}" type="datetimeFigureOut">
               <a:rPr lang="ko-KR" altLang="en-US" smtClean="0"/>
-              <a:t>2025-11-12</a:t>
+              <a:t>2025-11-24</a:t>
             </a:fld>
             <a:endParaRPr lang="ko-KR" altLang="en-US"/>
           </a:p>
@@ -3983,7 +3983,7 @@
           <a:p>
             <a:fld id="{FB30EDBD-1C2D-4C1E-B459-B60219FAB484}" type="datetimeFigureOut">
               <a:rPr lang="ko-KR" altLang="en-US" smtClean="0"/>
-              <a:t>2025-11-12</a:t>
+              <a:t>2025-11-24</a:t>
             </a:fld>
             <a:endParaRPr lang="ko-KR" altLang="en-US"/>
           </a:p>
@@ -4220,7 +4220,7 @@
           <a:p>
             <a:fld id="{FB30EDBD-1C2D-4C1E-B459-B60219FAB484}" type="datetimeFigureOut">
               <a:rPr lang="ko-KR" altLang="en-US" smtClean="0"/>
-              <a:t>2025-11-12</a:t>
+              <a:t>2025-11-24</a:t>
             </a:fld>
             <a:endParaRPr lang="ko-KR" altLang="en-US"/>
           </a:p>
@@ -4593,7 +4593,7 @@
           <a:p>
             <a:fld id="{FB30EDBD-1C2D-4C1E-B459-B60219FAB484}" type="datetimeFigureOut">
               <a:rPr lang="ko-KR" altLang="en-US" smtClean="0"/>
-              <a:t>2025-11-12</a:t>
+              <a:t>2025-11-24</a:t>
             </a:fld>
             <a:endParaRPr lang="ko-KR" altLang="en-US"/>
           </a:p>
@@ -4711,7 +4711,7 @@
           <a:p>
             <a:fld id="{FB30EDBD-1C2D-4C1E-B459-B60219FAB484}" type="datetimeFigureOut">
               <a:rPr lang="ko-KR" altLang="en-US" smtClean="0"/>
-              <a:t>2025-11-12</a:t>
+              <a:t>2025-11-24</a:t>
             </a:fld>
             <a:endParaRPr lang="ko-KR" altLang="en-US"/>
           </a:p>
@@ -4806,7 +4806,7 @@
           <a:p>
             <a:fld id="{FB30EDBD-1C2D-4C1E-B459-B60219FAB484}" type="datetimeFigureOut">
               <a:rPr lang="ko-KR" altLang="en-US" smtClean="0"/>
-              <a:t>2025-11-12</a:t>
+              <a:t>2025-11-24</a:t>
             </a:fld>
             <a:endParaRPr lang="ko-KR" altLang="en-US"/>
           </a:p>
@@ -5057,7 +5057,7 @@
           <a:p>
             <a:fld id="{FB30EDBD-1C2D-4C1E-B459-B60219FAB484}" type="datetimeFigureOut">
               <a:rPr lang="ko-KR" altLang="en-US" smtClean="0"/>
-              <a:t>2025-11-12</a:t>
+              <a:t>2025-11-24</a:t>
             </a:fld>
             <a:endParaRPr lang="ko-KR" altLang="en-US"/>
           </a:p>
@@ -5344,7 +5344,7 @@
           <a:p>
             <a:fld id="{FB30EDBD-1C2D-4C1E-B459-B60219FAB484}" type="datetimeFigureOut">
               <a:rPr lang="ko-KR" altLang="en-US" smtClean="0"/>
-              <a:t>2025-11-12</a:t>
+              <a:t>2025-11-24</a:t>
             </a:fld>
             <a:endParaRPr lang="ko-KR" altLang="en-US"/>
           </a:p>
@@ -5557,7 +5557,7 @@
           <a:p>
             <a:fld id="{FB30EDBD-1C2D-4C1E-B459-B60219FAB484}" type="datetimeFigureOut">
               <a:rPr lang="ko-KR" altLang="en-US" smtClean="0"/>
-              <a:t>2025-11-12</a:t>
+              <a:t>2025-11-24</a:t>
             </a:fld>
             <a:endParaRPr lang="ko-KR" altLang="en-US"/>
           </a:p>
@@ -31516,124 +31516,145 @@
           </a:p>
         </p:txBody>
       </p:sp>
-      <p:pic>
-        <p:nvPicPr>
-          <p:cNvPr id="3" name="그림 2"/>
-          <p:cNvPicPr>
-            <a:picLocks noChangeAspect="1"/>
-          </p:cNvPicPr>
+      <p:grpSp>
+        <p:nvGrpSpPr>
+          <p:cNvPr id="9" name="그룹 8">
+            <a:extLst>
+              <a:ext uri="{FF2B5EF4-FFF2-40B4-BE49-F238E27FC236}">
+                <a16:creationId xmlns:a16="http://schemas.microsoft.com/office/drawing/2014/main" id="{FB5E6075-C3CC-D9CA-DAA7-785CB4FEBBC0}"/>
+              </a:ext>
+            </a:extLst>
+          </p:cNvPr>
+          <p:cNvGrpSpPr/>
           <p:nvPr/>
-        </p:nvPicPr>
-        <p:blipFill>
-          <a:blip r:embed="rId2"/>
-          <a:stretch>
-            <a:fillRect/>
-          </a:stretch>
-        </p:blipFill>
-        <p:spPr>
+        </p:nvGrpSpPr>
+        <p:grpSpPr>
           <a:xfrm>
-            <a:off x="116776" y="3846621"/>
-            <a:ext cx="2329255" cy="1944384"/>
+            <a:off x="116776" y="1930740"/>
+            <a:ext cx="4669516" cy="3860265"/>
+            <a:chOff x="116776" y="1930740"/>
+            <a:chExt cx="4669516" cy="3860265"/>
           </a:xfrm>
-          <a:prstGeom prst="rect">
-            <a:avLst/>
-          </a:prstGeom>
-        </p:spPr>
-      </p:pic>
-      <p:pic>
-        <p:nvPicPr>
-          <p:cNvPr id="4" name="그림 3"/>
-          <p:cNvPicPr>
-            <a:picLocks noChangeAspect="1"/>
-          </p:cNvPicPr>
-          <p:nvPr/>
-        </p:nvPicPr>
-        <p:blipFill>
-          <a:blip r:embed="rId2"/>
-          <a:stretch>
-            <a:fillRect/>
-          </a:stretch>
-        </p:blipFill>
-        <p:spPr>
-          <a:xfrm>
-            <a:off x="2446032" y="3846621"/>
-            <a:ext cx="2340260" cy="1944384"/>
-          </a:xfrm>
-          <a:prstGeom prst="rect">
-            <a:avLst/>
-          </a:prstGeom>
-        </p:spPr>
-      </p:pic>
-      <p:pic>
-        <p:nvPicPr>
-          <p:cNvPr id="5" name="그림 4"/>
-          <p:cNvPicPr>
-            <a:picLocks noChangeAspect="1"/>
-          </p:cNvPicPr>
-          <p:nvPr/>
-        </p:nvPicPr>
-        <p:blipFill>
-          <a:blip r:embed="rId2"/>
-          <a:stretch>
-            <a:fillRect/>
-          </a:stretch>
-        </p:blipFill>
-        <p:spPr>
-          <a:xfrm>
-            <a:off x="1255990" y="1930740"/>
-            <a:ext cx="2340260" cy="1932487"/>
-          </a:xfrm>
-          <a:prstGeom prst="rect">
-            <a:avLst/>
-          </a:prstGeom>
-        </p:spPr>
-      </p:pic>
-      <p:pic>
-        <p:nvPicPr>
-          <p:cNvPr id="6" name="그림 5"/>
-          <p:cNvPicPr>
-            <a:picLocks noChangeAspect="1"/>
-          </p:cNvPicPr>
-          <p:nvPr/>
-        </p:nvPicPr>
-        <p:blipFill rotWithShape="1">
-          <a:blip r:embed="rId2"/>
-          <a:srcRect r="48556"/>
-          <a:stretch/>
-        </p:blipFill>
-        <p:spPr>
-          <a:xfrm>
-            <a:off x="3575720" y="1930740"/>
-            <a:ext cx="1203930" cy="1933225"/>
-          </a:xfrm>
-          <a:prstGeom prst="rect">
-            <a:avLst/>
-          </a:prstGeom>
-        </p:spPr>
-      </p:pic>
-      <p:pic>
-        <p:nvPicPr>
-          <p:cNvPr id="7" name="그림 6"/>
-          <p:cNvPicPr>
-            <a:picLocks noChangeAspect="1"/>
-          </p:cNvPicPr>
-          <p:nvPr/>
-        </p:nvPicPr>
-        <p:blipFill rotWithShape="1">
-          <a:blip r:embed="rId2"/>
-          <a:srcRect l="51530"/>
-          <a:stretch/>
-        </p:blipFill>
-        <p:spPr>
-          <a:xfrm>
-            <a:off x="116777" y="1935428"/>
-            <a:ext cx="1134315" cy="1927799"/>
-          </a:xfrm>
-          <a:prstGeom prst="rect">
-            <a:avLst/>
-          </a:prstGeom>
-        </p:spPr>
-      </p:pic>
+        </p:grpSpPr>
+        <p:pic>
+          <p:nvPicPr>
+            <p:cNvPr id="3" name="그림 2"/>
+            <p:cNvPicPr>
+              <a:picLocks noChangeAspect="1"/>
+            </p:cNvPicPr>
+            <p:nvPr/>
+          </p:nvPicPr>
+          <p:blipFill>
+            <a:blip r:embed="rId2"/>
+            <a:stretch>
+              <a:fillRect/>
+            </a:stretch>
+          </p:blipFill>
+          <p:spPr>
+            <a:xfrm>
+              <a:off x="116776" y="3846621"/>
+              <a:ext cx="2329255" cy="1944384"/>
+            </a:xfrm>
+            <a:prstGeom prst="rect">
+              <a:avLst/>
+            </a:prstGeom>
+          </p:spPr>
+        </p:pic>
+        <p:pic>
+          <p:nvPicPr>
+            <p:cNvPr id="4" name="그림 3"/>
+            <p:cNvPicPr>
+              <a:picLocks noChangeAspect="1"/>
+            </p:cNvPicPr>
+            <p:nvPr/>
+          </p:nvPicPr>
+          <p:blipFill>
+            <a:blip r:embed="rId2"/>
+            <a:stretch>
+              <a:fillRect/>
+            </a:stretch>
+          </p:blipFill>
+          <p:spPr>
+            <a:xfrm>
+              <a:off x="2446032" y="3846621"/>
+              <a:ext cx="2340260" cy="1944384"/>
+            </a:xfrm>
+            <a:prstGeom prst="rect">
+              <a:avLst/>
+            </a:prstGeom>
+          </p:spPr>
+        </p:pic>
+        <p:pic>
+          <p:nvPicPr>
+            <p:cNvPr id="5" name="그림 4"/>
+            <p:cNvPicPr>
+              <a:picLocks noChangeAspect="1"/>
+            </p:cNvPicPr>
+            <p:nvPr/>
+          </p:nvPicPr>
+          <p:blipFill>
+            <a:blip r:embed="rId2"/>
+            <a:stretch>
+              <a:fillRect/>
+            </a:stretch>
+          </p:blipFill>
+          <p:spPr>
+            <a:xfrm>
+              <a:off x="1255990" y="1930740"/>
+              <a:ext cx="2340260" cy="1932487"/>
+            </a:xfrm>
+            <a:prstGeom prst="rect">
+              <a:avLst/>
+            </a:prstGeom>
+          </p:spPr>
+        </p:pic>
+        <p:pic>
+          <p:nvPicPr>
+            <p:cNvPr id="6" name="그림 5"/>
+            <p:cNvPicPr>
+              <a:picLocks noChangeAspect="1"/>
+            </p:cNvPicPr>
+            <p:nvPr/>
+          </p:nvPicPr>
+          <p:blipFill rotWithShape="1">
+            <a:blip r:embed="rId2"/>
+            <a:srcRect r="48556"/>
+            <a:stretch/>
+          </p:blipFill>
+          <p:spPr>
+            <a:xfrm>
+              <a:off x="3575720" y="1930740"/>
+              <a:ext cx="1203930" cy="1933225"/>
+            </a:xfrm>
+            <a:prstGeom prst="rect">
+              <a:avLst/>
+            </a:prstGeom>
+          </p:spPr>
+        </p:pic>
+        <p:pic>
+          <p:nvPicPr>
+            <p:cNvPr id="7" name="그림 6"/>
+            <p:cNvPicPr>
+              <a:picLocks noChangeAspect="1"/>
+            </p:cNvPicPr>
+            <p:nvPr/>
+          </p:nvPicPr>
+          <p:blipFill rotWithShape="1">
+            <a:blip r:embed="rId2"/>
+            <a:srcRect l="51530"/>
+            <a:stretch/>
+          </p:blipFill>
+          <p:spPr>
+            <a:xfrm>
+              <a:off x="116777" y="1935428"/>
+              <a:ext cx="1134315" cy="1927799"/>
+            </a:xfrm>
+            <a:prstGeom prst="rect">
+              <a:avLst/>
+            </a:prstGeom>
+          </p:spPr>
+        </p:pic>
+      </p:grpSp>
       <p:cxnSp>
         <p:nvCxnSpPr>
           <p:cNvPr id="10" name="직선 연결선 9"/>
